--- a/ゲーム科3年/00_前期/オンラインゲームプログラミングⅡ/01_Photon導入.pptx
+++ b/ゲーム科3年/00_前期/オンラインゲームプログラミングⅡ/01_Photon導入.pptx
@@ -8,12 +8,13 @@
     <p:sldId id="256" r:id="rId2"/>
     <p:sldId id="257" r:id="rId3"/>
     <p:sldId id="258" r:id="rId4"/>
-    <p:sldId id="259" r:id="rId5"/>
-    <p:sldId id="260" r:id="rId6"/>
-    <p:sldId id="261" r:id="rId7"/>
-    <p:sldId id="262" r:id="rId8"/>
-    <p:sldId id="263" r:id="rId9"/>
-    <p:sldId id="264" r:id="rId10"/>
+    <p:sldId id="260" r:id="rId5"/>
+    <p:sldId id="261" r:id="rId6"/>
+    <p:sldId id="262" r:id="rId7"/>
+    <p:sldId id="263" r:id="rId8"/>
+    <p:sldId id="264" r:id="rId9"/>
+    <p:sldId id="265" r:id="rId10"/>
+    <p:sldId id="266" r:id="rId11"/>
   </p:sldIdLst>
   <p:sldSz cx="12192000" cy="6858000"/>
   <p:notesSz cx="6858000" cy="9144000"/>
@@ -267,7 +268,7 @@
           <a:p>
             <a:fld id="{E9CC885B-4903-4D54-9A93-00025F12DED9}" type="datetimeFigureOut">
               <a:rPr kumimoji="1" lang="ja-JP" altLang="en-US" smtClean="0"/>
-              <a:t>2025/1/20</a:t>
+              <a:t>2026/4/24</a:t>
             </a:fld>
             <a:endParaRPr kumimoji="1" lang="ja-JP" altLang="en-US"/>
           </a:p>
@@ -497,7 +498,7 @@
           <a:p>
             <a:fld id="{E9CC885B-4903-4D54-9A93-00025F12DED9}" type="datetimeFigureOut">
               <a:rPr kumimoji="1" lang="ja-JP" altLang="en-US" smtClean="0"/>
-              <a:t>2025/1/20</a:t>
+              <a:t>2026/4/24</a:t>
             </a:fld>
             <a:endParaRPr kumimoji="1" lang="ja-JP" altLang="en-US"/>
           </a:p>
@@ -737,7 +738,7 @@
           <a:p>
             <a:fld id="{E9CC885B-4903-4D54-9A93-00025F12DED9}" type="datetimeFigureOut">
               <a:rPr kumimoji="1" lang="ja-JP" altLang="en-US" smtClean="0"/>
-              <a:t>2025/1/20</a:t>
+              <a:t>2026/4/24</a:t>
             </a:fld>
             <a:endParaRPr kumimoji="1" lang="ja-JP" altLang="en-US"/>
           </a:p>
@@ -967,7 +968,7 @@
           <a:p>
             <a:fld id="{E9CC885B-4903-4D54-9A93-00025F12DED9}" type="datetimeFigureOut">
               <a:rPr kumimoji="1" lang="ja-JP" altLang="en-US" smtClean="0"/>
-              <a:t>2025/1/20</a:t>
+              <a:t>2026/4/24</a:t>
             </a:fld>
             <a:endParaRPr kumimoji="1" lang="ja-JP" altLang="en-US"/>
           </a:p>
@@ -1242,7 +1243,7 @@
           <a:p>
             <a:fld id="{E9CC885B-4903-4D54-9A93-00025F12DED9}" type="datetimeFigureOut">
               <a:rPr kumimoji="1" lang="ja-JP" altLang="en-US" smtClean="0"/>
-              <a:t>2025/1/20</a:t>
+              <a:t>2026/4/24</a:t>
             </a:fld>
             <a:endParaRPr kumimoji="1" lang="ja-JP" altLang="en-US"/>
           </a:p>
@@ -1571,7 +1572,7 @@
           <a:p>
             <a:fld id="{E9CC885B-4903-4D54-9A93-00025F12DED9}" type="datetimeFigureOut">
               <a:rPr kumimoji="1" lang="ja-JP" altLang="en-US" smtClean="0"/>
-              <a:t>2025/1/20</a:t>
+              <a:t>2026/4/24</a:t>
             </a:fld>
             <a:endParaRPr kumimoji="1" lang="ja-JP" altLang="en-US"/>
           </a:p>
@@ -2047,7 +2048,7 @@
           <a:p>
             <a:fld id="{E9CC885B-4903-4D54-9A93-00025F12DED9}" type="datetimeFigureOut">
               <a:rPr kumimoji="1" lang="ja-JP" altLang="en-US" smtClean="0"/>
-              <a:t>2025/1/20</a:t>
+              <a:t>2026/4/24</a:t>
             </a:fld>
             <a:endParaRPr kumimoji="1" lang="ja-JP" altLang="en-US"/>
           </a:p>
@@ -2188,7 +2189,7 @@
           <a:p>
             <a:fld id="{E9CC885B-4903-4D54-9A93-00025F12DED9}" type="datetimeFigureOut">
               <a:rPr kumimoji="1" lang="ja-JP" altLang="en-US" smtClean="0"/>
-              <a:t>2025/1/20</a:t>
+              <a:t>2026/4/24</a:t>
             </a:fld>
             <a:endParaRPr kumimoji="1" lang="ja-JP" altLang="en-US"/>
           </a:p>
@@ -2301,7 +2302,7 @@
           <a:p>
             <a:fld id="{E9CC885B-4903-4D54-9A93-00025F12DED9}" type="datetimeFigureOut">
               <a:rPr kumimoji="1" lang="ja-JP" altLang="en-US" smtClean="0"/>
-              <a:t>2025/1/20</a:t>
+              <a:t>2026/4/24</a:t>
             </a:fld>
             <a:endParaRPr kumimoji="1" lang="ja-JP" altLang="en-US"/>
           </a:p>
@@ -2644,7 +2645,7 @@
           <a:p>
             <a:fld id="{E9CC885B-4903-4D54-9A93-00025F12DED9}" type="datetimeFigureOut">
               <a:rPr kumimoji="1" lang="ja-JP" altLang="en-US" smtClean="0"/>
-              <a:t>2025/1/20</a:t>
+              <a:t>2026/4/24</a:t>
             </a:fld>
             <a:endParaRPr kumimoji="1" lang="ja-JP" altLang="en-US"/>
           </a:p>
@@ -2932,7 +2933,7 @@
           <a:p>
             <a:fld id="{E9CC885B-4903-4D54-9A93-00025F12DED9}" type="datetimeFigureOut">
               <a:rPr kumimoji="1" lang="ja-JP" altLang="en-US" smtClean="0"/>
-              <a:t>2025/1/20</a:t>
+              <a:t>2026/4/24</a:t>
             </a:fld>
             <a:endParaRPr kumimoji="1" lang="ja-JP" altLang="en-US"/>
           </a:p>
@@ -3205,7 +3206,7 @@
           <a:p>
             <a:fld id="{E9CC885B-4903-4D54-9A93-00025F12DED9}" type="datetimeFigureOut">
               <a:rPr kumimoji="1" lang="ja-JP" altLang="en-US" smtClean="0"/>
-              <a:t>2025/1/20</a:t>
+              <a:t>2026/4/24</a:t>
             </a:fld>
             <a:endParaRPr kumimoji="1" lang="ja-JP" altLang="en-US"/>
           </a:p>
@@ -3676,7 +3677,7 @@
         <p:spPr>
           <a:xfrm>
             <a:off x="567542" y="1216429"/>
-            <a:ext cx="11179664" cy="2677656"/>
+            <a:ext cx="11179664" cy="1200329"/>
           </a:xfrm>
           <a:prstGeom prst="rect">
             <a:avLst/>
@@ -3733,127 +3734,338 @@
           <a:p>
             <a:r>
               <a:rPr lang="ja-JP" altLang="en-US" sz="2400" dirty="0"/>
-              <a:t>オンライン要素のあるゲームには、ほぼ確実に使われています。</a:t>
+              <a:t>オンライン要素のあるゲーム開発にも、よく使われています。</a:t>
             </a:r>
             <a:endParaRPr lang="en-US" altLang="ja-JP" sz="2400" dirty="0"/>
-          </a:p>
-          <a:p>
-            <a:endParaRPr kumimoji="1" lang="en-US" altLang="ja-JP" sz="2400" dirty="0"/>
-          </a:p>
-          <a:p>
-            <a:r>
-              <a:rPr lang="ja-JP" altLang="en-US" sz="2400" dirty="0"/>
-              <a:t>なお</a:t>
-            </a:r>
-            <a:r>
-              <a:rPr lang="en-US" altLang="ja-JP" sz="2400" dirty="0"/>
-              <a:t>Photon</a:t>
-            </a:r>
-            <a:r>
-              <a:rPr lang="ja-JP" altLang="en-US" sz="2400" dirty="0"/>
-              <a:t>は</a:t>
-            </a:r>
-            <a:r>
-              <a:rPr lang="en-US" altLang="ja-JP" sz="2400" dirty="0"/>
-              <a:t>Unity</a:t>
-            </a:r>
-            <a:r>
-              <a:rPr lang="ja-JP" altLang="en-US" sz="2400" dirty="0"/>
-              <a:t>以外もサポートしており、</a:t>
-            </a:r>
-            <a:endParaRPr lang="en-US" altLang="ja-JP" sz="2400" dirty="0"/>
-          </a:p>
-          <a:p>
-            <a:r>
-              <a:rPr kumimoji="1" lang="en-US" altLang="ja-JP" sz="2400" dirty="0"/>
-              <a:t>Unity</a:t>
-            </a:r>
-            <a:r>
-              <a:rPr kumimoji="1" lang="ja-JP" altLang="en-US" sz="2400" dirty="0"/>
-              <a:t>向けの</a:t>
-            </a:r>
-            <a:r>
-              <a:rPr kumimoji="1" lang="en-US" altLang="ja-JP" sz="2400" dirty="0"/>
-              <a:t>Photon</a:t>
-            </a:r>
-            <a:r>
-              <a:rPr kumimoji="1" lang="ja-JP" altLang="en-US" sz="2400" dirty="0"/>
-              <a:t>サービスを、</a:t>
-            </a:r>
-            <a:endParaRPr kumimoji="1" lang="en-US" altLang="ja-JP" sz="2400" dirty="0"/>
-          </a:p>
-          <a:p>
-            <a:r>
-              <a:rPr kumimoji="1" lang="en-US" altLang="ja-JP" sz="2400" b="1" dirty="0">
-                <a:solidFill>
-                  <a:srgbClr val="FF0000"/>
-                </a:solidFill>
-              </a:rPr>
-              <a:t>PUN2(Photon Unity Networking 2)</a:t>
-            </a:r>
-            <a:r>
-              <a:rPr kumimoji="1" lang="ja-JP" altLang="en-US" sz="2400" dirty="0"/>
-              <a:t>と</a:t>
-            </a:r>
-            <a:r>
-              <a:rPr lang="ja-JP" altLang="en-US" sz="2400" dirty="0"/>
-              <a:t>呼ばれています。</a:t>
-            </a:r>
-            <a:endParaRPr kumimoji="1" lang="en-US" altLang="ja-JP" sz="2400" dirty="0"/>
           </a:p>
         </p:txBody>
       </p:sp>
       <p:pic>
         <p:nvPicPr>
-          <p:cNvPr id="1026" name="Picture 2" descr="screenshot">
-            <a:extLst>
-              <a:ext uri="{FF2B5EF4-FFF2-40B4-BE49-F238E27FC236}">
-                <a16:creationId xmlns:a16="http://schemas.microsoft.com/office/drawing/2014/main" id="{5C6D11E8-EC12-4580-948F-0314D7C49344}"/>
+          <p:cNvPr id="3" name="図 2">
+            <a:extLst>
+              <a:ext uri="{FF2B5EF4-FFF2-40B4-BE49-F238E27FC236}">
+                <a16:creationId xmlns:a16="http://schemas.microsoft.com/office/drawing/2014/main" id="{5E9B5D74-5A66-40CC-9BEE-7C62F9F55739}"/>
               </a:ext>
             </a:extLst>
           </p:cNvPr>
           <p:cNvPicPr>
-            <a:picLocks noChangeAspect="1" noChangeArrowheads="1"/>
+            <a:picLocks noChangeAspect="1"/>
           </p:cNvPicPr>
           <p:nvPr/>
         </p:nvPicPr>
         <p:blipFill>
-          <a:blip r:embed="rId2">
-            <a:extLst>
-              <a:ext uri="{28A0092B-C50C-407E-A947-70E740481C1C}">
-                <a14:useLocalDpi xmlns:a14="http://schemas.microsoft.com/office/drawing/2010/main" val="0"/>
-              </a:ext>
-            </a:extLst>
-          </a:blip>
-          <a:srcRect/>
+          <a:blip r:embed="rId2"/>
           <a:stretch>
             <a:fillRect/>
           </a:stretch>
         </p:blipFill>
-        <p:spPr bwMode="auto">
+        <p:spPr>
           <a:xfrm>
-            <a:off x="567542" y="4033785"/>
-            <a:ext cx="3598708" cy="2399139"/>
+            <a:off x="567542" y="2556458"/>
+            <a:ext cx="7399591" cy="3977281"/>
           </a:xfrm>
           <a:prstGeom prst="rect">
             <a:avLst/>
           </a:prstGeom>
-          <a:noFill/>
-          <a:extLst>
-            <a:ext uri="{909E8E84-426E-40DD-AFC4-6F175D3DCCD1}">
-              <a14:hiddenFill xmlns:a14="http://schemas.microsoft.com/office/drawing/2010/main">
-                <a:solidFill>
-                  <a:srgbClr val="FFFFFF"/>
-                </a:solidFill>
-              </a14:hiddenFill>
-            </a:ext>
-          </a:extLst>
         </p:spPr>
       </p:pic>
     </p:spTree>
     <p:extLst>
       <p:ext uri="{BB962C8B-B14F-4D97-AF65-F5344CB8AC3E}">
         <p14:creationId xmlns:p14="http://schemas.microsoft.com/office/powerpoint/2010/main" val="410028988"/>
+      </p:ext>
+    </p:extLst>
+  </p:cSld>
+  <p:clrMapOvr>
+    <a:masterClrMapping/>
+  </p:clrMapOvr>
+</p:sld>
+</file>
+
+<file path=ppt/slides/slide10.xml><?xml version="1.0" encoding="utf-8"?>
+<p:sld xmlns:a="http://schemas.openxmlformats.org/drawingml/2006/main" xmlns:r="http://schemas.openxmlformats.org/officeDocument/2006/relationships" xmlns:p="http://schemas.openxmlformats.org/presentationml/2006/main">
+  <p:cSld>
+    <p:spTree>
+      <p:nvGrpSpPr>
+        <p:cNvPr id="1" name=""/>
+        <p:cNvGrpSpPr/>
+        <p:nvPr/>
+      </p:nvGrpSpPr>
+      <p:grpSpPr>
+        <a:xfrm>
+          <a:off x="0" y="0"/>
+          <a:ext cx="0" cy="0"/>
+          <a:chOff x="0" y="0"/>
+          <a:chExt cx="0" cy="0"/>
+        </a:xfrm>
+      </p:grpSpPr>
+      <p:sp>
+        <p:nvSpPr>
+          <p:cNvPr id="4" name="テキスト ボックス 3">
+            <a:extLst>
+              <a:ext uri="{FF2B5EF4-FFF2-40B4-BE49-F238E27FC236}">
+                <a16:creationId xmlns:a16="http://schemas.microsoft.com/office/drawing/2014/main" id="{5A13BF46-B8C5-48AA-8308-C9ECFF431A18}"/>
+              </a:ext>
+            </a:extLst>
+          </p:cNvPr>
+          <p:cNvSpPr txBox="1"/>
+          <p:nvPr/>
+        </p:nvSpPr>
+        <p:spPr>
+          <a:xfrm>
+            <a:off x="567542" y="491954"/>
+            <a:ext cx="2438488" cy="584775"/>
+          </a:xfrm>
+          <a:prstGeom prst="rect">
+            <a:avLst/>
+          </a:prstGeom>
+          <a:noFill/>
+        </p:spPr>
+        <p:txBody>
+          <a:bodyPr wrap="none" rtlCol="0">
+            <a:spAutoFit/>
+          </a:bodyPr>
+          <a:lstStyle/>
+          <a:p>
+            <a:r>
+              <a:rPr kumimoji="1" lang="en-US" altLang="ja-JP" sz="3200" b="1" u="sng" dirty="0"/>
+              <a:t>Photon</a:t>
+            </a:r>
+            <a:r>
+              <a:rPr kumimoji="1" lang="ja-JP" altLang="en-US" sz="3200" b="1" u="sng" dirty="0"/>
+              <a:t>導入</a:t>
+            </a:r>
+          </a:p>
+        </p:txBody>
+      </p:sp>
+      <p:sp>
+        <p:nvSpPr>
+          <p:cNvPr id="6" name="テキスト ボックス 5">
+            <a:extLst>
+              <a:ext uri="{FF2B5EF4-FFF2-40B4-BE49-F238E27FC236}">
+                <a16:creationId xmlns:a16="http://schemas.microsoft.com/office/drawing/2014/main" id="{55830AD6-028B-4C4E-80BF-B70DFC1C3A46}"/>
+              </a:ext>
+            </a:extLst>
+          </p:cNvPr>
+          <p:cNvSpPr txBox="1"/>
+          <p:nvPr/>
+        </p:nvSpPr>
+        <p:spPr>
+          <a:xfrm>
+            <a:off x="567542" y="1216429"/>
+            <a:ext cx="5984331" cy="830997"/>
+          </a:xfrm>
+          <a:prstGeom prst="rect">
+            <a:avLst/>
+          </a:prstGeom>
+          <a:noFill/>
+        </p:spPr>
+        <p:txBody>
+          <a:bodyPr wrap="none" rtlCol="0">
+            <a:spAutoFit/>
+          </a:bodyPr>
+          <a:lstStyle/>
+          <a:p>
+            <a:r>
+              <a:rPr lang="ja-JP" altLang="en-US" sz="2400" dirty="0"/>
+              <a:t>最初の画面から、</a:t>
+            </a:r>
+            <a:r>
+              <a:rPr lang="en-US" altLang="ja-JP" sz="2400" dirty="0"/>
+              <a:t>App</a:t>
+            </a:r>
+            <a:r>
+              <a:rPr lang="ja-JP" altLang="en-US" sz="2400" dirty="0"/>
+              <a:t>の</a:t>
+            </a:r>
+            <a:r>
+              <a:rPr lang="en-US" altLang="ja-JP" sz="2400" dirty="0"/>
+              <a:t>ID</a:t>
+            </a:r>
+            <a:r>
+              <a:rPr lang="ja-JP" altLang="en-US" sz="2400" dirty="0"/>
+              <a:t>を登録します。</a:t>
+            </a:r>
+            <a:endParaRPr lang="en-US" altLang="ja-JP" sz="2400" dirty="0"/>
+          </a:p>
+          <a:p>
+            <a:r>
+              <a:rPr lang="ja-JP" altLang="en-US" sz="2400" dirty="0"/>
+              <a:t>これで準備完了です。</a:t>
+            </a:r>
+            <a:endParaRPr lang="en-US" altLang="ja-JP" sz="2400" dirty="0"/>
+          </a:p>
+        </p:txBody>
+      </p:sp>
+      <p:pic>
+        <p:nvPicPr>
+          <p:cNvPr id="3" name="図 2">
+            <a:extLst>
+              <a:ext uri="{FF2B5EF4-FFF2-40B4-BE49-F238E27FC236}">
+                <a16:creationId xmlns:a16="http://schemas.microsoft.com/office/drawing/2014/main" id="{F868C21F-1251-4A19-A041-C8608B5421DB}"/>
+              </a:ext>
+            </a:extLst>
+          </p:cNvPr>
+          <p:cNvPicPr>
+            <a:picLocks noChangeAspect="1"/>
+          </p:cNvPicPr>
+          <p:nvPr/>
+        </p:nvPicPr>
+        <p:blipFill>
+          <a:blip r:embed="rId2"/>
+          <a:stretch>
+            <a:fillRect/>
+          </a:stretch>
+        </p:blipFill>
+        <p:spPr>
+          <a:xfrm>
+            <a:off x="5368229" y="2187126"/>
+            <a:ext cx="5426770" cy="3844822"/>
+          </a:xfrm>
+          <a:prstGeom prst="rect">
+            <a:avLst/>
+          </a:prstGeom>
+        </p:spPr>
+      </p:pic>
+      <p:pic>
+        <p:nvPicPr>
+          <p:cNvPr id="8" name="図 7">
+            <a:extLst>
+              <a:ext uri="{FF2B5EF4-FFF2-40B4-BE49-F238E27FC236}">
+                <a16:creationId xmlns:a16="http://schemas.microsoft.com/office/drawing/2014/main" id="{AA0FD1B3-6028-44CC-831B-08CA61EBE7C6}"/>
+              </a:ext>
+            </a:extLst>
+          </p:cNvPr>
+          <p:cNvPicPr>
+            <a:picLocks noChangeAspect="1"/>
+          </p:cNvPicPr>
+          <p:nvPr/>
+        </p:nvPicPr>
+        <p:blipFill>
+          <a:blip r:embed="rId3"/>
+          <a:stretch>
+            <a:fillRect/>
+          </a:stretch>
+        </p:blipFill>
+        <p:spPr>
+          <a:xfrm>
+            <a:off x="567542" y="2187126"/>
+            <a:ext cx="4588658" cy="2485523"/>
+          </a:xfrm>
+          <a:prstGeom prst="rect">
+            <a:avLst/>
+          </a:prstGeom>
+        </p:spPr>
+      </p:pic>
+      <p:sp>
+        <p:nvSpPr>
+          <p:cNvPr id="9" name="正方形/長方形 8">
+            <a:extLst>
+              <a:ext uri="{FF2B5EF4-FFF2-40B4-BE49-F238E27FC236}">
+                <a16:creationId xmlns:a16="http://schemas.microsoft.com/office/drawing/2014/main" id="{19AFAFF6-27AD-4B64-83A0-4763CE95A0B0}"/>
+              </a:ext>
+            </a:extLst>
+          </p:cNvPr>
+          <p:cNvSpPr/>
+          <p:nvPr/>
+        </p:nvSpPr>
+        <p:spPr>
+          <a:xfrm>
+            <a:off x="685799" y="2631469"/>
+            <a:ext cx="1989667" cy="259248"/>
+          </a:xfrm>
+          <a:prstGeom prst="rect">
+            <a:avLst/>
+          </a:prstGeom>
+          <a:noFill/>
+          <a:ln w="38100">
+            <a:solidFill>
+              <a:srgbClr val="FF0000"/>
+            </a:solidFill>
+          </a:ln>
+        </p:spPr>
+        <p:style>
+          <a:lnRef idx="2">
+            <a:schemeClr val="accent1">
+              <a:shade val="50000"/>
+            </a:schemeClr>
+          </a:lnRef>
+          <a:fillRef idx="1">
+            <a:schemeClr val="accent1"/>
+          </a:fillRef>
+          <a:effectRef idx="0">
+            <a:schemeClr val="accent1"/>
+          </a:effectRef>
+          <a:fontRef idx="minor">
+            <a:schemeClr val="lt1"/>
+          </a:fontRef>
+        </p:style>
+        <p:txBody>
+          <a:bodyPr rtlCol="0" anchor="ctr"/>
+          <a:lstStyle/>
+          <a:p>
+            <a:pPr algn="ctr"/>
+            <a:endParaRPr kumimoji="1" lang="ja-JP" altLang="en-US"/>
+          </a:p>
+        </p:txBody>
+      </p:sp>
+      <p:sp>
+        <p:nvSpPr>
+          <p:cNvPr id="10" name="正方形/長方形 9">
+            <a:extLst>
+              <a:ext uri="{FF2B5EF4-FFF2-40B4-BE49-F238E27FC236}">
+                <a16:creationId xmlns:a16="http://schemas.microsoft.com/office/drawing/2014/main" id="{44DC743F-6528-465F-A31C-29C6A2A74009}"/>
+              </a:ext>
+            </a:extLst>
+          </p:cNvPr>
+          <p:cNvSpPr/>
+          <p:nvPr/>
+        </p:nvSpPr>
+        <p:spPr>
+          <a:xfrm>
+            <a:off x="7408333" y="5036002"/>
+            <a:ext cx="3149599" cy="259248"/>
+          </a:xfrm>
+          <a:prstGeom prst="rect">
+            <a:avLst/>
+          </a:prstGeom>
+          <a:noFill/>
+          <a:ln w="38100">
+            <a:solidFill>
+              <a:srgbClr val="FF0000"/>
+            </a:solidFill>
+          </a:ln>
+        </p:spPr>
+        <p:style>
+          <a:lnRef idx="2">
+            <a:schemeClr val="accent1">
+              <a:shade val="50000"/>
+            </a:schemeClr>
+          </a:lnRef>
+          <a:fillRef idx="1">
+            <a:schemeClr val="accent1"/>
+          </a:fillRef>
+          <a:effectRef idx="0">
+            <a:schemeClr val="accent1"/>
+          </a:effectRef>
+          <a:fontRef idx="minor">
+            <a:schemeClr val="lt1"/>
+          </a:fontRef>
+        </p:style>
+        <p:txBody>
+          <a:bodyPr rtlCol="0" anchor="ctr"/>
+          <a:lstStyle/>
+          <a:p>
+            <a:pPr algn="ctr"/>
+            <a:endParaRPr kumimoji="1" lang="ja-JP" altLang="en-US"/>
+          </a:p>
+        </p:txBody>
+      </p:sp>
+    </p:spTree>
+    <p:extLst>
+      <p:ext uri="{BB962C8B-B14F-4D97-AF65-F5344CB8AC3E}">
+        <p14:creationId xmlns:p14="http://schemas.microsoft.com/office/powerpoint/2010/main" val="2870224368"/>
       </p:ext>
     </p:extLst>
   </p:cSld>
@@ -4128,7 +4340,7 @@
         <p:spPr>
           <a:xfrm>
             <a:off x="567542" y="1216429"/>
-            <a:ext cx="8802410" cy="830997"/>
+            <a:ext cx="6955750" cy="830997"/>
           </a:xfrm>
           <a:prstGeom prst="rect">
             <a:avLst/>
@@ -4150,19 +4362,15 @@
           <a:p>
             <a:r>
               <a:rPr kumimoji="1" lang="ja-JP" altLang="en-US" sz="2400" dirty="0"/>
-              <a:t>アカウントページからは</a:t>
-            </a:r>
-            <a:r>
-              <a:rPr kumimoji="1" lang="ja-JP" altLang="en-US" sz="2400" b="1" dirty="0">
-                <a:solidFill>
-                  <a:srgbClr val="FF0000"/>
-                </a:solidFill>
-              </a:rPr>
-              <a:t>サーバーを作成</a:t>
+              <a:t>ますは</a:t>
+            </a:r>
+            <a:r>
+              <a:rPr kumimoji="1" lang="en-US" altLang="ja-JP" sz="2400" dirty="0"/>
+              <a:t>App</a:t>
             </a:r>
             <a:r>
               <a:rPr kumimoji="1" lang="ja-JP" altLang="en-US" sz="2400" dirty="0"/>
-              <a:t>することができます。</a:t>
+              <a:t>を作成しましょう。</a:t>
             </a:r>
             <a:endParaRPr kumimoji="1" lang="en-US" altLang="ja-JP" sz="2400" dirty="0"/>
           </a:p>
@@ -4170,10 +4378,10 @@
       </p:sp>
       <p:pic>
         <p:nvPicPr>
-          <p:cNvPr id="3" name="図 2">
-            <a:extLst>
-              <a:ext uri="{FF2B5EF4-FFF2-40B4-BE49-F238E27FC236}">
-                <a16:creationId xmlns:a16="http://schemas.microsoft.com/office/drawing/2014/main" id="{EE872D6A-5609-43DB-96FC-3C9243783281}"/>
+          <p:cNvPr id="8" name="図 7">
+            <a:extLst>
+              <a:ext uri="{FF2B5EF4-FFF2-40B4-BE49-F238E27FC236}">
+                <a16:creationId xmlns:a16="http://schemas.microsoft.com/office/drawing/2014/main" id="{A21B5D2E-A7E4-4B08-8B76-BC55EFFB9807}"/>
               </a:ext>
             </a:extLst>
           </p:cNvPr>
@@ -4190,14 +4398,68 @@
         </p:blipFill>
         <p:spPr>
           <a:xfrm>
-            <a:off x="567542" y="2187127"/>
-            <a:ext cx="8802410" cy="4297090"/>
+            <a:off x="567542" y="2187126"/>
+            <a:ext cx="10887858" cy="3935370"/>
           </a:xfrm>
           <a:prstGeom prst="rect">
             <a:avLst/>
           </a:prstGeom>
         </p:spPr>
       </p:pic>
+      <p:sp>
+        <p:nvSpPr>
+          <p:cNvPr id="9" name="矢印: 右 8">
+            <a:extLst>
+              <a:ext uri="{FF2B5EF4-FFF2-40B4-BE49-F238E27FC236}">
+                <a16:creationId xmlns:a16="http://schemas.microsoft.com/office/drawing/2014/main" id="{9721777C-991D-4456-8F32-D5E96B15EDDC}"/>
+              </a:ext>
+            </a:extLst>
+          </p:cNvPr>
+          <p:cNvSpPr/>
+          <p:nvPr/>
+        </p:nvSpPr>
+        <p:spPr>
+          <a:xfrm rot="13414979">
+            <a:off x="2321373" y="4876799"/>
+            <a:ext cx="635000" cy="397933"/>
+          </a:xfrm>
+          <a:prstGeom prst="rightArrow">
+            <a:avLst/>
+          </a:prstGeom>
+          <a:solidFill>
+            <a:srgbClr val="FF0000"/>
+          </a:solidFill>
+          <a:ln>
+            <a:solidFill>
+              <a:schemeClr val="tx1"/>
+            </a:solidFill>
+          </a:ln>
+        </p:spPr>
+        <p:style>
+          <a:lnRef idx="2">
+            <a:schemeClr val="accent1">
+              <a:shade val="50000"/>
+            </a:schemeClr>
+          </a:lnRef>
+          <a:fillRef idx="1">
+            <a:schemeClr val="accent1"/>
+          </a:fillRef>
+          <a:effectRef idx="0">
+            <a:schemeClr val="accent1"/>
+          </a:effectRef>
+          <a:fontRef idx="minor">
+            <a:schemeClr val="lt1"/>
+          </a:fontRef>
+        </p:style>
+        <p:txBody>
+          <a:bodyPr rtlCol="0" anchor="ctr"/>
+          <a:lstStyle/>
+          <a:p>
+            <a:pPr algn="ctr"/>
+            <a:endParaRPr kumimoji="1" lang="ja-JP" altLang="en-US"/>
+          </a:p>
+        </p:txBody>
+      </p:sp>
     </p:spTree>
     <p:extLst>
       <p:ext uri="{BB962C8B-B14F-4D97-AF65-F5344CB8AC3E}">
@@ -4282,7 +4544,7 @@
         <p:spPr>
           <a:xfrm>
             <a:off x="567542" y="1216429"/>
-            <a:ext cx="6955750" cy="830997"/>
+            <a:ext cx="3877985" cy="461665"/>
           </a:xfrm>
           <a:prstGeom prst="rect">
             <a:avLst/>
@@ -4296,88 +4558,19 @@
           <a:lstStyle/>
           <a:p>
             <a:r>
-              <a:rPr lang="ja-JP" altLang="en-US" sz="2400" b="1" dirty="0">
-                <a:solidFill>
-                  <a:srgbClr val="FF0000"/>
-                </a:solidFill>
-              </a:rPr>
-              <a:t>「アプリケーション　＞　</a:t>
-            </a:r>
-            <a:r>
-              <a:rPr lang="en-US" altLang="ja-JP" sz="2400" b="1" dirty="0">
-                <a:solidFill>
-                  <a:srgbClr val="FF0000"/>
-                </a:solidFill>
-              </a:rPr>
-              <a:t>Public Cloud</a:t>
-            </a:r>
-            <a:r>
-              <a:rPr lang="ja-JP" altLang="en-US" sz="2400" b="1" dirty="0">
-                <a:solidFill>
-                  <a:srgbClr val="FF0000"/>
-                </a:solidFill>
-              </a:rPr>
-              <a:t>」</a:t>
-            </a:r>
-            <a:r>
-              <a:rPr lang="en-US" altLang="ja-JP" sz="2400" b="1" dirty="0">
-                <a:solidFill>
-                  <a:srgbClr val="FF0000"/>
-                </a:solidFill>
-              </a:rPr>
-              <a:t> </a:t>
-            </a:r>
-            <a:r>
-              <a:rPr lang="ja-JP" altLang="en-US" sz="2400" dirty="0"/>
-              <a:t>から</a:t>
-            </a:r>
-            <a:endParaRPr lang="en-US" altLang="ja-JP" sz="2400" dirty="0"/>
-          </a:p>
-          <a:p>
-            <a:r>
-              <a:rPr lang="ja-JP" altLang="en-US" sz="2400" dirty="0"/>
-              <a:t>サーバーとなるアプリケーションを作成します。</a:t>
+              <a:rPr kumimoji="1" lang="ja-JP" altLang="en-US" sz="2400" dirty="0"/>
+              <a:t>各項目を記入しましょう。</a:t>
             </a:r>
             <a:endParaRPr kumimoji="1" lang="en-US" altLang="ja-JP" sz="2400" dirty="0"/>
           </a:p>
         </p:txBody>
       </p:sp>
-      <p:pic>
-        <p:nvPicPr>
-          <p:cNvPr id="5" name="図 4">
-            <a:extLst>
-              <a:ext uri="{FF2B5EF4-FFF2-40B4-BE49-F238E27FC236}">
-                <a16:creationId xmlns:a16="http://schemas.microsoft.com/office/drawing/2014/main" id="{F7129297-CD72-47EF-8B6C-3A4CCFBA6E97}"/>
-              </a:ext>
-            </a:extLst>
-          </p:cNvPr>
-          <p:cNvPicPr>
-            <a:picLocks noChangeAspect="1"/>
-          </p:cNvPicPr>
-          <p:nvPr/>
-        </p:nvPicPr>
-        <p:blipFill>
-          <a:blip r:embed="rId2"/>
-          <a:stretch>
-            <a:fillRect/>
-          </a:stretch>
-        </p:blipFill>
-        <p:spPr>
-          <a:xfrm>
-            <a:off x="567542" y="2187126"/>
-            <a:ext cx="10047452" cy="3802194"/>
-          </a:xfrm>
-          <a:prstGeom prst="rect">
-            <a:avLst/>
-          </a:prstGeom>
-        </p:spPr>
-      </p:pic>
-      <p:sp>
-        <p:nvSpPr>
-          <p:cNvPr id="7" name="正方形/長方形 6">
-            <a:extLst>
-              <a:ext uri="{FF2B5EF4-FFF2-40B4-BE49-F238E27FC236}">
-                <a16:creationId xmlns:a16="http://schemas.microsoft.com/office/drawing/2014/main" id="{F4B5AE68-6BAE-4183-BCBE-9BFD52643F0D}"/>
+      <p:sp>
+        <p:nvSpPr>
+          <p:cNvPr id="9" name="正方形/長方形 8">
+            <a:extLst>
+              <a:ext uri="{FF2B5EF4-FFF2-40B4-BE49-F238E27FC236}">
+                <a16:creationId xmlns:a16="http://schemas.microsoft.com/office/drawing/2014/main" id="{831237CB-94AE-4217-9B40-EBE947796124}"/>
               </a:ext>
             </a:extLst>
           </p:cNvPr>
@@ -4386,14 +4579,14 @@
         </p:nvSpPr>
         <p:spPr>
           <a:xfrm>
-            <a:off x="8211312" y="5129784"/>
-            <a:ext cx="1115568" cy="374904"/>
+            <a:off x="6784397" y="2976492"/>
+            <a:ext cx="1710646" cy="383509"/>
           </a:xfrm>
           <a:prstGeom prst="rect">
             <a:avLst/>
           </a:prstGeom>
           <a:noFill/>
-          <a:ln w="38100">
+          <a:ln w="12700">
             <a:solidFill>
               <a:srgbClr val="FF0000"/>
             </a:solidFill>
@@ -4420,14 +4613,170 @@
           <a:lstStyle/>
           <a:p>
             <a:pPr algn="ctr"/>
+            <a:r>
+              <a:rPr kumimoji="1" lang="en-US" altLang="ja-JP" dirty="0">
+                <a:solidFill>
+                  <a:schemeClr val="tx1"/>
+                </a:solidFill>
+              </a:rPr>
+              <a:t>Fusion</a:t>
+            </a:r>
+            <a:r>
+              <a:rPr kumimoji="1" lang="ja-JP" altLang="en-US" dirty="0">
+                <a:solidFill>
+                  <a:schemeClr val="tx1"/>
+                </a:solidFill>
+              </a:rPr>
+              <a:t>に設定</a:t>
+            </a:r>
+          </a:p>
+        </p:txBody>
+      </p:sp>
+      <p:pic>
+        <p:nvPicPr>
+          <p:cNvPr id="5" name="図 4">
+            <a:extLst>
+              <a:ext uri="{FF2B5EF4-FFF2-40B4-BE49-F238E27FC236}">
+                <a16:creationId xmlns:a16="http://schemas.microsoft.com/office/drawing/2014/main" id="{A3C0E8BB-26B9-4960-BDCC-E4381D6C119D}"/>
+              </a:ext>
+            </a:extLst>
+          </p:cNvPr>
+          <p:cNvPicPr>
+            <a:picLocks noChangeAspect="1"/>
+          </p:cNvPicPr>
+          <p:nvPr/>
+        </p:nvPicPr>
+        <p:blipFill>
+          <a:blip r:embed="rId2"/>
+          <a:stretch>
+            <a:fillRect/>
+          </a:stretch>
+        </p:blipFill>
+        <p:spPr>
+          <a:xfrm>
+            <a:off x="567542" y="1817795"/>
+            <a:ext cx="6180391" cy="3366963"/>
+          </a:xfrm>
+          <a:prstGeom prst="rect">
+            <a:avLst/>
+          </a:prstGeom>
+        </p:spPr>
+      </p:pic>
+      <p:sp>
+        <p:nvSpPr>
+          <p:cNvPr id="14" name="正方形/長方形 13">
+            <a:extLst>
+              <a:ext uri="{FF2B5EF4-FFF2-40B4-BE49-F238E27FC236}">
+                <a16:creationId xmlns:a16="http://schemas.microsoft.com/office/drawing/2014/main" id="{EE1E3DA4-E4CC-4D0C-9A08-D68AA39FED51}"/>
+              </a:ext>
+            </a:extLst>
+          </p:cNvPr>
+          <p:cNvSpPr/>
+          <p:nvPr/>
+        </p:nvSpPr>
+        <p:spPr>
+          <a:xfrm>
+            <a:off x="567542" y="1875806"/>
+            <a:ext cx="3132391" cy="985928"/>
+          </a:xfrm>
+          <a:prstGeom prst="rect">
+            <a:avLst/>
+          </a:prstGeom>
+          <a:noFill/>
+          <a:ln w="38100">
+            <a:solidFill>
+              <a:srgbClr val="FF0000"/>
+            </a:solidFill>
+          </a:ln>
+        </p:spPr>
+        <p:style>
+          <a:lnRef idx="2">
+            <a:schemeClr val="accent1">
+              <a:shade val="50000"/>
+            </a:schemeClr>
+          </a:lnRef>
+          <a:fillRef idx="1">
+            <a:schemeClr val="accent1"/>
+          </a:fillRef>
+          <a:effectRef idx="0">
+            <a:schemeClr val="accent1"/>
+          </a:effectRef>
+          <a:fontRef idx="minor">
+            <a:schemeClr val="lt1"/>
+          </a:fontRef>
+        </p:style>
+        <p:txBody>
+          <a:bodyPr rtlCol="0" anchor="ctr"/>
+          <a:lstStyle/>
+          <a:p>
+            <a:pPr algn="ctr"/>
             <a:endParaRPr kumimoji="1" lang="ja-JP" altLang="en-US"/>
+          </a:p>
+        </p:txBody>
+      </p:sp>
+      <p:sp>
+        <p:nvSpPr>
+          <p:cNvPr id="15" name="正方形/長方形 14">
+            <a:extLst>
+              <a:ext uri="{FF2B5EF4-FFF2-40B4-BE49-F238E27FC236}">
+                <a16:creationId xmlns:a16="http://schemas.microsoft.com/office/drawing/2014/main" id="{EE4C58CE-DFCD-4800-A151-D5CB49960C7F}"/>
+              </a:ext>
+            </a:extLst>
+          </p:cNvPr>
+          <p:cNvSpPr/>
+          <p:nvPr/>
+        </p:nvSpPr>
+        <p:spPr>
+          <a:xfrm>
+            <a:off x="6784397" y="3429000"/>
+            <a:ext cx="2630536" cy="383509"/>
+          </a:xfrm>
+          <a:prstGeom prst="rect">
+            <a:avLst/>
+          </a:prstGeom>
+          <a:noFill/>
+          <a:ln w="12700">
+            <a:solidFill>
+              <a:srgbClr val="FF0000"/>
+            </a:solidFill>
+          </a:ln>
+        </p:spPr>
+        <p:style>
+          <a:lnRef idx="2">
+            <a:schemeClr val="accent1">
+              <a:shade val="50000"/>
+            </a:schemeClr>
+          </a:lnRef>
+          <a:fillRef idx="1">
+            <a:schemeClr val="accent1"/>
+          </a:fillRef>
+          <a:effectRef idx="0">
+            <a:schemeClr val="accent1"/>
+          </a:effectRef>
+          <a:fontRef idx="minor">
+            <a:schemeClr val="lt1"/>
+          </a:fontRef>
+        </p:style>
+        <p:txBody>
+          <a:bodyPr rtlCol="0" anchor="ctr"/>
+          <a:lstStyle/>
+          <a:p>
+            <a:pPr algn="ctr"/>
+            <a:r>
+              <a:rPr kumimoji="1" lang="ja-JP" altLang="en-US" dirty="0">
+                <a:solidFill>
+                  <a:schemeClr val="tx1"/>
+                </a:solidFill>
+              </a:rPr>
+              <a:t>プロジェクト名が無難</a:t>
+            </a:r>
           </a:p>
         </p:txBody>
       </p:sp>
     </p:spTree>
     <p:extLst>
       <p:ext uri="{BB962C8B-B14F-4D97-AF65-F5344CB8AC3E}">
-        <p14:creationId xmlns:p14="http://schemas.microsoft.com/office/powerpoint/2010/main" val="2555879808"/>
+        <p14:creationId xmlns:p14="http://schemas.microsoft.com/office/powerpoint/2010/main" val="3797418725"/>
       </p:ext>
     </p:extLst>
   </p:cSld>
@@ -4508,7 +4857,7 @@
         <p:spPr>
           <a:xfrm>
             <a:off x="567542" y="1216429"/>
-            <a:ext cx="3877985" cy="461665"/>
+            <a:ext cx="7879080" cy="830997"/>
           </a:xfrm>
           <a:prstGeom prst="rect">
             <a:avLst/>
@@ -4522,19 +4871,86 @@
           <a:lstStyle/>
           <a:p>
             <a:r>
-              <a:rPr kumimoji="1" lang="ja-JP" altLang="en-US" sz="2400" dirty="0"/>
-              <a:t>各項目を記入しましょう。</a:t>
-            </a:r>
-            <a:endParaRPr kumimoji="1" lang="en-US" altLang="ja-JP" sz="2400" dirty="0"/>
+              <a:rPr lang="ja-JP" altLang="en-US" sz="2400" dirty="0"/>
+              <a:t>作成した</a:t>
+            </a:r>
+            <a:r>
+              <a:rPr lang="en-US" altLang="ja-JP" sz="2400" dirty="0"/>
+              <a:t>App</a:t>
+            </a:r>
+            <a:r>
+              <a:rPr lang="ja-JP" altLang="en-US" sz="2400" dirty="0"/>
+              <a:t>は今後使用します。</a:t>
+            </a:r>
+            <a:endParaRPr lang="en-US" altLang="ja-JP" sz="2400" dirty="0"/>
+          </a:p>
+          <a:p>
+            <a:r>
+              <a:rPr lang="ja-JP" altLang="en-US" sz="2400" dirty="0"/>
+              <a:t>いつでもこのページを開けるようにしておきましょう。</a:t>
+            </a:r>
+            <a:endParaRPr lang="en-US" altLang="ja-JP" sz="2400" dirty="0"/>
+          </a:p>
+        </p:txBody>
+      </p:sp>
+      <p:sp>
+        <p:nvSpPr>
+          <p:cNvPr id="15" name="テキスト ボックス 14">
+            <a:extLst>
+              <a:ext uri="{FF2B5EF4-FFF2-40B4-BE49-F238E27FC236}">
+                <a16:creationId xmlns:a16="http://schemas.microsoft.com/office/drawing/2014/main" id="{06446AFF-0C05-4940-8135-D380248AC4C6}"/>
+              </a:ext>
+            </a:extLst>
+          </p:cNvPr>
+          <p:cNvSpPr txBox="1"/>
+          <p:nvPr/>
+        </p:nvSpPr>
+        <p:spPr>
+          <a:xfrm>
+            <a:off x="4360931" y="6037554"/>
+            <a:ext cx="7263527" cy="461665"/>
+          </a:xfrm>
+          <a:prstGeom prst="rect">
+            <a:avLst/>
+          </a:prstGeom>
+          <a:noFill/>
+        </p:spPr>
+        <p:txBody>
+          <a:bodyPr wrap="none" rtlCol="0">
+            <a:spAutoFit/>
+          </a:bodyPr>
+          <a:lstStyle/>
+          <a:p>
+            <a:r>
+              <a:rPr lang="en-US" altLang="ja-JP" sz="2400" b="1" dirty="0">
+                <a:solidFill>
+                  <a:srgbClr val="00B050"/>
+                </a:solidFill>
+              </a:rPr>
+              <a:t>※</a:t>
+            </a:r>
+            <a:r>
+              <a:rPr lang="ja-JP" altLang="en-US" sz="2400" b="1" dirty="0">
+                <a:solidFill>
+                  <a:srgbClr val="00B050"/>
+                </a:solidFill>
+              </a:rPr>
+              <a:t>ページをお気に入りにしておくとよいと思います</a:t>
+            </a:r>
+            <a:endParaRPr lang="en-US" altLang="ja-JP" sz="2400" b="1" dirty="0">
+              <a:solidFill>
+                <a:srgbClr val="00B050"/>
+              </a:solidFill>
+            </a:endParaRPr>
           </a:p>
         </p:txBody>
       </p:sp>
       <p:pic>
         <p:nvPicPr>
-          <p:cNvPr id="3" name="図 2">
-            <a:extLst>
-              <a:ext uri="{FF2B5EF4-FFF2-40B4-BE49-F238E27FC236}">
-                <a16:creationId xmlns:a16="http://schemas.microsoft.com/office/drawing/2014/main" id="{62DDEDCC-887E-4830-B59E-A7B6CA04688C}"/>
+          <p:cNvPr id="5" name="図 4">
+            <a:extLst>
+              <a:ext uri="{FF2B5EF4-FFF2-40B4-BE49-F238E27FC236}">
+                <a16:creationId xmlns:a16="http://schemas.microsoft.com/office/drawing/2014/main" id="{C7730358-DC25-418B-8156-F01B1D590B65}"/>
               </a:ext>
             </a:extLst>
           </p:cNvPr>
@@ -4551,336 +4967,18 @@
         </p:blipFill>
         <p:spPr>
           <a:xfrm>
-            <a:off x="567542" y="1817794"/>
-            <a:ext cx="5818913" cy="4548252"/>
+            <a:off x="567542" y="2187126"/>
+            <a:ext cx="5401458" cy="3805829"/>
           </a:xfrm>
           <a:prstGeom prst="rect">
             <a:avLst/>
           </a:prstGeom>
         </p:spPr>
       </p:pic>
-      <p:sp>
-        <p:nvSpPr>
-          <p:cNvPr id="8" name="正方形/長方形 7">
-            <a:extLst>
-              <a:ext uri="{FF2B5EF4-FFF2-40B4-BE49-F238E27FC236}">
-                <a16:creationId xmlns:a16="http://schemas.microsoft.com/office/drawing/2014/main" id="{04AD1F16-30E2-48C8-B16F-8DC126E7142D}"/>
-              </a:ext>
-            </a:extLst>
-          </p:cNvPr>
-          <p:cNvSpPr/>
-          <p:nvPr/>
-        </p:nvSpPr>
-        <p:spPr>
-          <a:xfrm>
-            <a:off x="788535" y="2126606"/>
-            <a:ext cx="2680805" cy="1100687"/>
-          </a:xfrm>
-          <a:prstGeom prst="rect">
-            <a:avLst/>
-          </a:prstGeom>
-          <a:noFill/>
-          <a:ln w="38100">
-            <a:solidFill>
-              <a:srgbClr val="FF0000"/>
-            </a:solidFill>
-          </a:ln>
-        </p:spPr>
-        <p:style>
-          <a:lnRef idx="2">
-            <a:schemeClr val="accent1">
-              <a:shade val="50000"/>
-            </a:schemeClr>
-          </a:lnRef>
-          <a:fillRef idx="1">
-            <a:schemeClr val="accent1"/>
-          </a:fillRef>
-          <a:effectRef idx="0">
-            <a:schemeClr val="accent1"/>
-          </a:effectRef>
-          <a:fontRef idx="minor">
-            <a:schemeClr val="lt1"/>
-          </a:fontRef>
-        </p:style>
-        <p:txBody>
-          <a:bodyPr rtlCol="0" anchor="ctr"/>
-          <a:lstStyle/>
-          <a:p>
-            <a:pPr algn="ctr"/>
-            <a:endParaRPr kumimoji="1" lang="ja-JP" altLang="en-US"/>
-          </a:p>
-        </p:txBody>
-      </p:sp>
-      <p:sp>
-        <p:nvSpPr>
-          <p:cNvPr id="9" name="正方形/長方形 8">
-            <a:extLst>
-              <a:ext uri="{FF2B5EF4-FFF2-40B4-BE49-F238E27FC236}">
-                <a16:creationId xmlns:a16="http://schemas.microsoft.com/office/drawing/2014/main" id="{831237CB-94AE-4217-9B40-EBE947796124}"/>
-              </a:ext>
-            </a:extLst>
-          </p:cNvPr>
-          <p:cNvSpPr/>
-          <p:nvPr/>
-        </p:nvSpPr>
-        <p:spPr>
-          <a:xfrm>
-            <a:off x="3590204" y="3527612"/>
-            <a:ext cx="1710646" cy="383509"/>
-          </a:xfrm>
-          <a:prstGeom prst="rect">
-            <a:avLst/>
-          </a:prstGeom>
-          <a:noFill/>
-          <a:ln w="12700">
-            <a:solidFill>
-              <a:srgbClr val="FF0000"/>
-            </a:solidFill>
-          </a:ln>
-        </p:spPr>
-        <p:style>
-          <a:lnRef idx="2">
-            <a:schemeClr val="accent1">
-              <a:shade val="50000"/>
-            </a:schemeClr>
-          </a:lnRef>
-          <a:fillRef idx="1">
-            <a:schemeClr val="accent1"/>
-          </a:fillRef>
-          <a:effectRef idx="0">
-            <a:schemeClr val="accent1"/>
-          </a:effectRef>
-          <a:fontRef idx="minor">
-            <a:schemeClr val="lt1"/>
-          </a:fontRef>
-        </p:style>
-        <p:txBody>
-          <a:bodyPr rtlCol="0" anchor="ctr"/>
-          <a:lstStyle/>
-          <a:p>
-            <a:pPr algn="ctr"/>
-            <a:r>
-              <a:rPr kumimoji="1" lang="en-US" altLang="ja-JP" dirty="0">
-                <a:solidFill>
-                  <a:schemeClr val="tx1"/>
-                </a:solidFill>
-              </a:rPr>
-              <a:t>Pun</a:t>
-            </a:r>
-            <a:r>
-              <a:rPr kumimoji="1" lang="ja-JP" altLang="en-US" dirty="0">
-                <a:solidFill>
-                  <a:schemeClr val="tx1"/>
-                </a:solidFill>
-              </a:rPr>
-              <a:t>に設定</a:t>
-            </a:r>
-          </a:p>
-        </p:txBody>
-      </p:sp>
-      <p:sp>
-        <p:nvSpPr>
-          <p:cNvPr id="11" name="正方形/長方形 10">
-            <a:extLst>
-              <a:ext uri="{FF2B5EF4-FFF2-40B4-BE49-F238E27FC236}">
-                <a16:creationId xmlns:a16="http://schemas.microsoft.com/office/drawing/2014/main" id="{ED46D1C7-E5B9-4572-8845-C216D8230B10}"/>
-              </a:ext>
-            </a:extLst>
-          </p:cNvPr>
-          <p:cNvSpPr/>
-          <p:nvPr/>
-        </p:nvSpPr>
-        <p:spPr>
-          <a:xfrm>
-            <a:off x="6386454" y="4091920"/>
-            <a:ext cx="2506533" cy="383509"/>
-          </a:xfrm>
-          <a:prstGeom prst="rect">
-            <a:avLst/>
-          </a:prstGeom>
-          <a:noFill/>
-          <a:ln w="12700">
-            <a:solidFill>
-              <a:srgbClr val="FF0000"/>
-            </a:solidFill>
-          </a:ln>
-        </p:spPr>
-        <p:style>
-          <a:lnRef idx="2">
-            <a:schemeClr val="accent1">
-              <a:shade val="50000"/>
-            </a:schemeClr>
-          </a:lnRef>
-          <a:fillRef idx="1">
-            <a:schemeClr val="accent1"/>
-          </a:fillRef>
-          <a:effectRef idx="0">
-            <a:schemeClr val="accent1"/>
-          </a:effectRef>
-          <a:fontRef idx="minor">
-            <a:schemeClr val="lt1"/>
-          </a:fontRef>
-        </p:style>
-        <p:txBody>
-          <a:bodyPr rtlCol="0" anchor="ctr"/>
-          <a:lstStyle/>
-          <a:p>
-            <a:pPr algn="ctr"/>
-            <a:r>
-              <a:rPr kumimoji="1" lang="en-US" altLang="ja-JP" dirty="0" err="1">
-                <a:solidFill>
-                  <a:schemeClr val="tx1"/>
-                </a:solidFill>
-              </a:rPr>
-              <a:t>OGPⅡ</a:t>
-            </a:r>
-            <a:r>
-              <a:rPr kumimoji="1" lang="ja-JP" altLang="en-US" dirty="0">
-                <a:solidFill>
-                  <a:schemeClr val="tx1"/>
-                </a:solidFill>
-              </a:rPr>
-              <a:t>に設定</a:t>
-            </a:r>
-          </a:p>
-        </p:txBody>
-      </p:sp>
-      <p:sp>
-        <p:nvSpPr>
-          <p:cNvPr id="12" name="正方形/長方形 11">
-            <a:extLst>
-              <a:ext uri="{FF2B5EF4-FFF2-40B4-BE49-F238E27FC236}">
-                <a16:creationId xmlns:a16="http://schemas.microsoft.com/office/drawing/2014/main" id="{5B47CBE5-0BCA-44B6-B950-A7C38CDB5102}"/>
-              </a:ext>
-            </a:extLst>
-          </p:cNvPr>
-          <p:cNvSpPr/>
-          <p:nvPr/>
-        </p:nvSpPr>
-        <p:spPr>
-          <a:xfrm>
-            <a:off x="6386454" y="4701520"/>
-            <a:ext cx="2506533" cy="383509"/>
-          </a:xfrm>
-          <a:prstGeom prst="rect">
-            <a:avLst/>
-          </a:prstGeom>
-          <a:noFill/>
-          <a:ln w="12700">
-            <a:solidFill>
-              <a:srgbClr val="FF0000"/>
-            </a:solidFill>
-          </a:ln>
-        </p:spPr>
-        <p:style>
-          <a:lnRef idx="2">
-            <a:schemeClr val="accent1">
-              <a:shade val="50000"/>
-            </a:schemeClr>
-          </a:lnRef>
-          <a:fillRef idx="1">
-            <a:schemeClr val="accent1"/>
-          </a:fillRef>
-          <a:effectRef idx="0">
-            <a:schemeClr val="accent1"/>
-          </a:effectRef>
-          <a:fontRef idx="minor">
-            <a:schemeClr val="lt1"/>
-          </a:fontRef>
-        </p:style>
-        <p:txBody>
-          <a:bodyPr rtlCol="0" anchor="ctr"/>
-          <a:lstStyle/>
-          <a:p>
-            <a:pPr algn="ctr"/>
-            <a:r>
-              <a:rPr kumimoji="1" lang="ja-JP" altLang="en-US" dirty="0">
-                <a:solidFill>
-                  <a:schemeClr val="tx1"/>
-                </a:solidFill>
-              </a:rPr>
-              <a:t>簡単に説明を書く</a:t>
-            </a:r>
-          </a:p>
-        </p:txBody>
-      </p:sp>
-      <p:sp>
-        <p:nvSpPr>
-          <p:cNvPr id="13" name="正方形/長方形 12">
-            <a:extLst>
-              <a:ext uri="{FF2B5EF4-FFF2-40B4-BE49-F238E27FC236}">
-                <a16:creationId xmlns:a16="http://schemas.microsoft.com/office/drawing/2014/main" id="{9F5E916D-237A-4ED9-B9CD-3385954EAA48}"/>
-              </a:ext>
-            </a:extLst>
-          </p:cNvPr>
-          <p:cNvSpPr/>
-          <p:nvPr/>
-        </p:nvSpPr>
-        <p:spPr>
-          <a:xfrm>
-            <a:off x="6386454" y="5533783"/>
-            <a:ext cx="4864252" cy="383509"/>
-          </a:xfrm>
-          <a:prstGeom prst="rect">
-            <a:avLst/>
-          </a:prstGeom>
-          <a:noFill/>
-          <a:ln w="12700">
-            <a:solidFill>
-              <a:srgbClr val="FF0000"/>
-            </a:solidFill>
-          </a:ln>
-        </p:spPr>
-        <p:style>
-          <a:lnRef idx="2">
-            <a:schemeClr val="accent1">
-              <a:shade val="50000"/>
-            </a:schemeClr>
-          </a:lnRef>
-          <a:fillRef idx="1">
-            <a:schemeClr val="accent1"/>
-          </a:fillRef>
-          <a:effectRef idx="0">
-            <a:schemeClr val="accent1"/>
-          </a:effectRef>
-          <a:fontRef idx="minor">
-            <a:schemeClr val="lt1"/>
-          </a:fontRef>
-        </p:style>
-        <p:txBody>
-          <a:bodyPr rtlCol="0" anchor="ctr"/>
-          <a:lstStyle/>
-          <a:p>
-            <a:pPr algn="ctr"/>
-            <a:r>
-              <a:rPr kumimoji="1" lang="en-US" altLang="ja-JP" dirty="0">
-                <a:solidFill>
-                  <a:schemeClr val="tx1"/>
-                </a:solidFill>
-                <a:hlinkClick r:id="rId3"/>
-              </a:rPr>
-              <a:t>https://www</a:t>
-            </a:r>
-            <a:r>
-              <a:rPr kumimoji="1" lang="en-US" altLang="ja-JP" dirty="0">
-                <a:solidFill>
-                  <a:schemeClr val="tx1"/>
-                </a:solidFill>
-              </a:rPr>
-              <a:t>.OnlineGameProgramming2.jp</a:t>
-            </a:r>
-            <a:endParaRPr kumimoji="1" lang="ja-JP" altLang="en-US" dirty="0">
-              <a:solidFill>
-                <a:schemeClr val="tx1"/>
-              </a:solidFill>
-            </a:endParaRPr>
-          </a:p>
-        </p:txBody>
-      </p:sp>
     </p:spTree>
     <p:extLst>
       <p:ext uri="{BB962C8B-B14F-4D97-AF65-F5344CB8AC3E}">
-        <p14:creationId xmlns:p14="http://schemas.microsoft.com/office/powerpoint/2010/main" val="3797418725"/>
+        <p14:creationId xmlns:p14="http://schemas.microsoft.com/office/powerpoint/2010/main" val="39708660"/>
       </p:ext>
     </p:extLst>
   </p:cSld>
@@ -4961,7 +5059,7 @@
         <p:spPr>
           <a:xfrm>
             <a:off x="567542" y="1216429"/>
-            <a:ext cx="7879080" cy="830997"/>
+            <a:ext cx="8738290" cy="830997"/>
           </a:xfrm>
           <a:prstGeom prst="rect">
             <a:avLst/>
@@ -4976,77 +5074,49 @@
           <a:p>
             <a:r>
               <a:rPr lang="ja-JP" altLang="en-US" sz="2400" dirty="0"/>
-              <a:t>これでサーバー側は作成完了です。</a:t>
+              <a:t>次に</a:t>
+            </a:r>
+            <a:r>
+              <a:rPr lang="en-US" altLang="ja-JP" sz="2400" dirty="0"/>
+              <a:t>Photon</a:t>
+            </a:r>
+            <a:r>
+              <a:rPr lang="ja-JP" altLang="en-US" sz="2400" dirty="0"/>
+              <a:t>の</a:t>
+            </a:r>
+            <a:r>
+              <a:rPr lang="en-US" altLang="ja-JP" sz="2400" dirty="0"/>
+              <a:t>SDK</a:t>
+            </a:r>
+            <a:r>
+              <a:rPr lang="ja-JP" altLang="en-US" sz="2400" dirty="0"/>
+              <a:t>を</a:t>
+            </a:r>
+            <a:r>
+              <a:rPr lang="en-US" altLang="ja-JP" sz="2400" dirty="0"/>
+              <a:t>Unity</a:t>
+            </a:r>
+            <a:r>
+              <a:rPr lang="ja-JP" altLang="en-US" sz="2400" dirty="0"/>
+              <a:t>プロジェクトにインポートします。</a:t>
             </a:r>
             <a:endParaRPr lang="en-US" altLang="ja-JP" sz="2400" dirty="0"/>
           </a:p>
           <a:p>
             <a:r>
               <a:rPr lang="ja-JP" altLang="en-US" sz="2400" dirty="0"/>
-              <a:t>授業では今回作ったサーバーを使って進めていきます。</a:t>
+              <a:t>まずは新規プロジェクトを作成しましょう。</a:t>
             </a:r>
             <a:endParaRPr lang="en-US" altLang="ja-JP" sz="2400" dirty="0"/>
-          </a:p>
-        </p:txBody>
-      </p:sp>
-      <p:sp>
-        <p:nvSpPr>
-          <p:cNvPr id="15" name="テキスト ボックス 14">
-            <a:extLst>
-              <a:ext uri="{FF2B5EF4-FFF2-40B4-BE49-F238E27FC236}">
-                <a16:creationId xmlns:a16="http://schemas.microsoft.com/office/drawing/2014/main" id="{06446AFF-0C05-4940-8135-D380248AC4C6}"/>
-              </a:ext>
-            </a:extLst>
-          </p:cNvPr>
-          <p:cNvSpPr txBox="1"/>
-          <p:nvPr/>
-        </p:nvSpPr>
-        <p:spPr>
-          <a:xfrm>
-            <a:off x="4360931" y="6037554"/>
-            <a:ext cx="7263527" cy="461665"/>
-          </a:xfrm>
-          <a:prstGeom prst="rect">
-            <a:avLst/>
-          </a:prstGeom>
-          <a:noFill/>
-        </p:spPr>
-        <p:txBody>
-          <a:bodyPr wrap="none" rtlCol="0">
-            <a:spAutoFit/>
-          </a:bodyPr>
-          <a:lstStyle/>
-          <a:p>
-            <a:r>
-              <a:rPr lang="en-US" altLang="ja-JP" sz="2400" b="1" dirty="0">
-                <a:solidFill>
-                  <a:srgbClr val="00B050"/>
-                </a:solidFill>
-              </a:rPr>
-              <a:t>※</a:t>
-            </a:r>
-            <a:r>
-              <a:rPr lang="ja-JP" altLang="en-US" sz="2400" b="1" dirty="0">
-                <a:solidFill>
-                  <a:srgbClr val="00B050"/>
-                </a:solidFill>
-              </a:rPr>
-              <a:t>ページをお気に入りにしておくとよいと思います</a:t>
-            </a:r>
-            <a:endParaRPr lang="en-US" altLang="ja-JP" sz="2400" b="1" dirty="0">
-              <a:solidFill>
-                <a:srgbClr val="00B050"/>
-              </a:solidFill>
-            </a:endParaRPr>
           </a:p>
         </p:txBody>
       </p:sp>
       <p:pic>
         <p:nvPicPr>
-          <p:cNvPr id="3" name="図 2">
-            <a:extLst>
-              <a:ext uri="{FF2B5EF4-FFF2-40B4-BE49-F238E27FC236}">
-                <a16:creationId xmlns:a16="http://schemas.microsoft.com/office/drawing/2014/main" id="{EF49B1AD-A8BD-4958-9D48-E075D76D2F9C}"/>
+          <p:cNvPr id="5" name="図 4">
+            <a:extLst>
+              <a:ext uri="{FF2B5EF4-FFF2-40B4-BE49-F238E27FC236}">
+                <a16:creationId xmlns:a16="http://schemas.microsoft.com/office/drawing/2014/main" id="{C02761A6-94E9-41E3-A97A-83AE0F05FBE2}"/>
               </a:ext>
             </a:extLst>
           </p:cNvPr>
@@ -5064,69 +5134,17 @@
         <p:spPr>
           <a:xfrm>
             <a:off x="567542" y="2187126"/>
-            <a:ext cx="4479588" cy="3719491"/>
+            <a:ext cx="6764591" cy="3635968"/>
           </a:xfrm>
           <a:prstGeom prst="rect">
             <a:avLst/>
           </a:prstGeom>
         </p:spPr>
       </p:pic>
-      <p:sp>
-        <p:nvSpPr>
-          <p:cNvPr id="9" name="正方形/長方形 8">
-            <a:extLst>
-              <a:ext uri="{FF2B5EF4-FFF2-40B4-BE49-F238E27FC236}">
-                <a16:creationId xmlns:a16="http://schemas.microsoft.com/office/drawing/2014/main" id="{387C2AB9-21E6-48C8-9B05-171801E93AB6}"/>
-              </a:ext>
-            </a:extLst>
-          </p:cNvPr>
-          <p:cNvSpPr/>
-          <p:nvPr/>
-        </p:nvSpPr>
-        <p:spPr>
-          <a:xfrm>
-            <a:off x="567543" y="3551994"/>
-            <a:ext cx="3170740" cy="2354623"/>
-          </a:xfrm>
-          <a:prstGeom prst="rect">
-            <a:avLst/>
-          </a:prstGeom>
-          <a:noFill/>
-          <a:ln w="38100">
-            <a:solidFill>
-              <a:srgbClr val="FF0000"/>
-            </a:solidFill>
-          </a:ln>
-        </p:spPr>
-        <p:style>
-          <a:lnRef idx="2">
-            <a:schemeClr val="accent1">
-              <a:shade val="50000"/>
-            </a:schemeClr>
-          </a:lnRef>
-          <a:fillRef idx="1">
-            <a:schemeClr val="accent1"/>
-          </a:fillRef>
-          <a:effectRef idx="0">
-            <a:schemeClr val="accent1"/>
-          </a:effectRef>
-          <a:fontRef idx="minor">
-            <a:schemeClr val="lt1"/>
-          </a:fontRef>
-        </p:style>
-        <p:txBody>
-          <a:bodyPr rtlCol="0" anchor="ctr"/>
-          <a:lstStyle/>
-          <a:p>
-            <a:pPr algn="ctr"/>
-            <a:endParaRPr kumimoji="1" lang="ja-JP" altLang="en-US"/>
-          </a:p>
-        </p:txBody>
-      </p:sp>
     </p:spTree>
     <p:extLst>
       <p:ext uri="{BB962C8B-B14F-4D97-AF65-F5344CB8AC3E}">
-        <p14:creationId xmlns:p14="http://schemas.microsoft.com/office/powerpoint/2010/main" val="39708660"/>
+        <p14:creationId xmlns:p14="http://schemas.microsoft.com/office/powerpoint/2010/main" val="3576268417"/>
       </p:ext>
     </p:extLst>
   </p:cSld>
@@ -5207,7 +5225,7 @@
         <p:spPr>
           <a:xfrm>
             <a:off x="567542" y="1216429"/>
-            <a:ext cx="7585731" cy="1938992"/>
+            <a:ext cx="6144631" cy="461665"/>
           </a:xfrm>
           <a:prstGeom prst="rect">
             <a:avLst/>
@@ -5221,100 +5239,20 @@
           <a:lstStyle/>
           <a:p>
             <a:r>
-              <a:rPr lang="ja-JP" altLang="en-US" sz="2400" dirty="0"/>
-              <a:t>続いて</a:t>
-            </a:r>
-            <a:r>
-              <a:rPr lang="en-US" altLang="ja-JP" sz="2400" dirty="0"/>
-              <a:t>Unity</a:t>
-            </a:r>
-            <a:r>
-              <a:rPr lang="ja-JP" altLang="en-US" sz="2400" dirty="0"/>
-              <a:t>側にも</a:t>
-            </a:r>
-            <a:r>
               <a:rPr lang="en-US" altLang="ja-JP" sz="2400" dirty="0"/>
               <a:t>Photon</a:t>
             </a:r>
             <a:r>
               <a:rPr lang="ja-JP" altLang="en-US" sz="2400" dirty="0"/>
-              <a:t>の準備をしていきます。</a:t>
-            </a:r>
-            <a:endParaRPr lang="en-US" altLang="ja-JP" sz="2400" dirty="0"/>
-          </a:p>
-          <a:p>
+              <a:t>のページの</a:t>
+            </a:r>
+            <a:r>
+              <a:rPr lang="en-US" altLang="ja-JP" sz="2400" dirty="0"/>
+              <a:t>SDK</a:t>
+            </a:r>
             <a:r>
               <a:rPr lang="ja-JP" altLang="en-US" sz="2400" dirty="0"/>
-              <a:t>まずは</a:t>
-            </a:r>
-            <a:r>
-              <a:rPr lang="en-US" altLang="ja-JP" sz="2400" dirty="0"/>
-              <a:t>Unity</a:t>
-            </a:r>
-            <a:r>
-              <a:rPr lang="ja-JP" altLang="en-US" sz="2400" dirty="0"/>
-              <a:t>の</a:t>
-            </a:r>
-            <a:r>
-              <a:rPr lang="en-US" altLang="ja-JP" sz="2400" b="1" dirty="0">
-                <a:solidFill>
-                  <a:srgbClr val="FF0000"/>
-                </a:solidFill>
-              </a:rPr>
-              <a:t>Asset Store</a:t>
-            </a:r>
-            <a:r>
-              <a:rPr lang="ja-JP" altLang="en-US" sz="2400" dirty="0"/>
-              <a:t>にサインインしましょう。</a:t>
-            </a:r>
-            <a:endParaRPr lang="en-US" altLang="ja-JP" sz="2400" dirty="0"/>
-          </a:p>
-          <a:p>
-            <a:endParaRPr lang="en-US" altLang="ja-JP" sz="2400" dirty="0"/>
-          </a:p>
-          <a:p>
-            <a:r>
-              <a:rPr lang="ja-JP" altLang="en-US" sz="2400" b="1" dirty="0">
-                <a:solidFill>
-                  <a:srgbClr val="FF0000"/>
-                </a:solidFill>
-              </a:rPr>
-              <a:t>■</a:t>
-            </a:r>
-            <a:r>
-              <a:rPr lang="en-US" altLang="ja-JP" sz="2400" b="1" dirty="0">
-                <a:solidFill>
-                  <a:srgbClr val="FF0000"/>
-                </a:solidFill>
-              </a:rPr>
-              <a:t>Asset Store</a:t>
-            </a:r>
-            <a:r>
-              <a:rPr lang="ja-JP" altLang="en-US" sz="2400" b="1" dirty="0">
-                <a:solidFill>
-                  <a:srgbClr val="FF0000"/>
-                </a:solidFill>
-              </a:rPr>
-              <a:t>リンク</a:t>
-            </a:r>
-            <a:endParaRPr lang="en-US" altLang="ja-JP" sz="2400" b="1" dirty="0">
-              <a:solidFill>
-                <a:srgbClr val="FF0000"/>
-              </a:solidFill>
-            </a:endParaRPr>
-          </a:p>
-          <a:p>
-            <a:r>
-              <a:rPr lang="ja-JP" altLang="en-US" sz="2400" dirty="0">
-                <a:hlinkClick r:id="rId2"/>
-              </a:rPr>
-              <a:t>ゲーム制作に最適なアセット </a:t>
-            </a:r>
-            <a:r>
-              <a:rPr lang="en-US" altLang="ja-JP" sz="2400" dirty="0">
-                <a:hlinkClick r:id="rId2"/>
-              </a:rPr>
-              <a:t>| Unity Asset Store</a:t>
+              <a:t>をクリックします。</a:t>
             </a:r>
             <a:endParaRPr lang="en-US" altLang="ja-JP" sz="2400" dirty="0"/>
           </a:p>
@@ -5325,7 +5263,7 @@
           <p:cNvPr id="3" name="図 2">
             <a:extLst>
               <a:ext uri="{FF2B5EF4-FFF2-40B4-BE49-F238E27FC236}">
-                <a16:creationId xmlns:a16="http://schemas.microsoft.com/office/drawing/2014/main" id="{516EB3DB-4A2C-4D8B-BD4F-42E421D2EBFF}"/>
+                <a16:creationId xmlns:a16="http://schemas.microsoft.com/office/drawing/2014/main" id="{4EA111A1-F6BA-4134-B73F-FCDD9985DFAC}"/>
               </a:ext>
             </a:extLst>
           </p:cNvPr>
@@ -5335,25 +5273,79 @@
           <p:nvPr/>
         </p:nvPicPr>
         <p:blipFill>
-          <a:blip r:embed="rId3"/>
+          <a:blip r:embed="rId2"/>
           <a:stretch>
             <a:fillRect/>
           </a:stretch>
         </p:blipFill>
         <p:spPr>
           <a:xfrm>
-            <a:off x="567542" y="3295121"/>
-            <a:ext cx="6846270" cy="3280679"/>
+            <a:off x="567543" y="1817794"/>
+            <a:ext cx="7306458" cy="4819935"/>
           </a:xfrm>
           <a:prstGeom prst="rect">
             <a:avLst/>
           </a:prstGeom>
         </p:spPr>
       </p:pic>
+      <p:sp>
+        <p:nvSpPr>
+          <p:cNvPr id="7" name="矢印: 右 6">
+            <a:extLst>
+              <a:ext uri="{FF2B5EF4-FFF2-40B4-BE49-F238E27FC236}">
+                <a16:creationId xmlns:a16="http://schemas.microsoft.com/office/drawing/2014/main" id="{E142A3FF-EC10-4C60-9C4B-B661B13F145F}"/>
+              </a:ext>
+            </a:extLst>
+          </p:cNvPr>
+          <p:cNvSpPr/>
+          <p:nvPr/>
+        </p:nvSpPr>
+        <p:spPr>
+          <a:xfrm rot="13414979">
+            <a:off x="5547173" y="2235200"/>
+            <a:ext cx="635000" cy="397933"/>
+          </a:xfrm>
+          <a:prstGeom prst="rightArrow">
+            <a:avLst/>
+          </a:prstGeom>
+          <a:solidFill>
+            <a:srgbClr val="FF0000"/>
+          </a:solidFill>
+          <a:ln>
+            <a:solidFill>
+              <a:schemeClr val="tx1"/>
+            </a:solidFill>
+          </a:ln>
+        </p:spPr>
+        <p:style>
+          <a:lnRef idx="2">
+            <a:schemeClr val="accent1">
+              <a:shade val="50000"/>
+            </a:schemeClr>
+          </a:lnRef>
+          <a:fillRef idx="1">
+            <a:schemeClr val="accent1"/>
+          </a:fillRef>
+          <a:effectRef idx="0">
+            <a:schemeClr val="accent1"/>
+          </a:effectRef>
+          <a:fontRef idx="minor">
+            <a:schemeClr val="lt1"/>
+          </a:fontRef>
+        </p:style>
+        <p:txBody>
+          <a:bodyPr rtlCol="0" anchor="ctr"/>
+          <a:lstStyle/>
+          <a:p>
+            <a:pPr algn="ctr"/>
+            <a:endParaRPr kumimoji="1" lang="ja-JP" altLang="en-US"/>
+          </a:p>
+        </p:txBody>
+      </p:sp>
     </p:spTree>
     <p:extLst>
       <p:ext uri="{BB962C8B-B14F-4D97-AF65-F5344CB8AC3E}">
-        <p14:creationId xmlns:p14="http://schemas.microsoft.com/office/powerpoint/2010/main" val="3576268417"/>
+        <p14:creationId xmlns:p14="http://schemas.microsoft.com/office/powerpoint/2010/main" val="2781402315"/>
       </p:ext>
     </p:extLst>
   </p:cSld>
@@ -5434,7 +5426,7 @@
         <p:spPr>
           <a:xfrm>
             <a:off x="567542" y="1216429"/>
-            <a:ext cx="11396068" cy="1938992"/>
+            <a:ext cx="8903399" cy="461665"/>
           </a:xfrm>
           <a:prstGeom prst="rect">
             <a:avLst/>
@@ -5448,74 +5440,12 @@
           <a:lstStyle/>
           <a:p>
             <a:r>
+              <a:rPr lang="en-US" altLang="ja-JP" sz="2400" dirty="0"/>
+              <a:t>Photon Fusion SDK </a:t>
+            </a:r>
+            <a:r>
               <a:rPr lang="ja-JP" altLang="en-US" sz="2400" dirty="0"/>
-              <a:t>無料版の</a:t>
-            </a:r>
-            <a:r>
-              <a:rPr lang="en-US" altLang="ja-JP" sz="2400" dirty="0"/>
-              <a:t>PUN2</a:t>
-            </a:r>
-            <a:r>
-              <a:rPr lang="ja-JP" altLang="en-US" sz="2400" dirty="0"/>
-              <a:t>を購入します。</a:t>
-            </a:r>
-            <a:endParaRPr lang="en-US" altLang="ja-JP" sz="2400" dirty="0"/>
-          </a:p>
-          <a:p>
-            <a:r>
-              <a:rPr lang="ja-JP" altLang="en-US" sz="2400" dirty="0"/>
-              <a:t>これで</a:t>
-            </a:r>
-            <a:r>
-              <a:rPr lang="en-US" altLang="ja-JP" sz="2400" dirty="0"/>
-              <a:t>Unity</a:t>
-            </a:r>
-            <a:r>
-              <a:rPr lang="ja-JP" altLang="en-US" sz="2400" dirty="0"/>
-              <a:t>のプロジェクトに必要なデータをインポートできるようになります。</a:t>
-            </a:r>
-            <a:endParaRPr lang="en-US" altLang="ja-JP" sz="2400" dirty="0"/>
-          </a:p>
-          <a:p>
-            <a:endParaRPr lang="en-US" altLang="ja-JP" sz="2400" dirty="0"/>
-          </a:p>
-          <a:p>
-            <a:r>
-              <a:rPr lang="ja-JP" altLang="en-US" sz="2400" b="1" dirty="0">
-                <a:solidFill>
-                  <a:srgbClr val="FF0000"/>
-                </a:solidFill>
-              </a:rPr>
-              <a:t>■</a:t>
-            </a:r>
-            <a:r>
-              <a:rPr lang="en-US" altLang="ja-JP" sz="2400" b="1" dirty="0">
-                <a:solidFill>
-                  <a:srgbClr val="FF0000"/>
-                </a:solidFill>
-              </a:rPr>
-              <a:t>PUN2</a:t>
-            </a:r>
-            <a:r>
-              <a:rPr lang="ja-JP" altLang="en-US" sz="2400" b="1" dirty="0">
-                <a:solidFill>
-                  <a:srgbClr val="FF0000"/>
-                </a:solidFill>
-              </a:rPr>
-              <a:t>無料版リンク</a:t>
-            </a:r>
-            <a:endParaRPr lang="en-US" altLang="ja-JP" sz="2400" b="1" dirty="0">
-              <a:solidFill>
-                <a:srgbClr val="FF0000"/>
-              </a:solidFill>
-            </a:endParaRPr>
-          </a:p>
-          <a:p>
-            <a:r>
-              <a:rPr lang="en-US" altLang="ja-JP" sz="2400" dirty="0">
-                <a:hlinkClick r:id="rId2"/>
-              </a:rPr>
-              <a:t>PUN 2 - FREE | Network | Unity Asset Store</a:t>
+              <a:t>をクリックしてダウンロードしましょう。</a:t>
             </a:r>
             <a:endParaRPr lang="en-US" altLang="ja-JP" sz="2400" dirty="0"/>
           </a:p>
@@ -5523,10 +5453,10 @@
       </p:sp>
       <p:pic>
         <p:nvPicPr>
-          <p:cNvPr id="5" name="図 4">
-            <a:extLst>
-              <a:ext uri="{FF2B5EF4-FFF2-40B4-BE49-F238E27FC236}">
-                <a16:creationId xmlns:a16="http://schemas.microsoft.com/office/drawing/2014/main" id="{B7408EBE-1DC3-41C1-A38B-F06E107EA95D}"/>
+          <p:cNvPr id="3" name="図 2">
+            <a:extLst>
+              <a:ext uri="{FF2B5EF4-FFF2-40B4-BE49-F238E27FC236}">
+                <a16:creationId xmlns:a16="http://schemas.microsoft.com/office/drawing/2014/main" id="{2EA43507-C61A-4D8A-9782-D8AE5F97E88D}"/>
               </a:ext>
             </a:extLst>
           </p:cNvPr>
@@ -5536,25 +5466,79 @@
           <p:nvPr/>
         </p:nvPicPr>
         <p:blipFill>
-          <a:blip r:embed="rId3"/>
+          <a:blip r:embed="rId2"/>
           <a:stretch>
             <a:fillRect/>
           </a:stretch>
         </p:blipFill>
         <p:spPr>
           <a:xfrm>
-            <a:off x="567542" y="3295121"/>
-            <a:ext cx="5965946" cy="3142556"/>
+            <a:off x="567542" y="1817794"/>
+            <a:ext cx="10041191" cy="4181783"/>
           </a:xfrm>
           <a:prstGeom prst="rect">
             <a:avLst/>
           </a:prstGeom>
         </p:spPr>
       </p:pic>
+      <p:sp>
+        <p:nvSpPr>
+          <p:cNvPr id="7" name="矢印: 右 6">
+            <a:extLst>
+              <a:ext uri="{FF2B5EF4-FFF2-40B4-BE49-F238E27FC236}">
+                <a16:creationId xmlns:a16="http://schemas.microsoft.com/office/drawing/2014/main" id="{5A0278F6-BFD7-46F8-81DB-68521A315A72}"/>
+              </a:ext>
+            </a:extLst>
+          </p:cNvPr>
+          <p:cNvSpPr/>
+          <p:nvPr/>
+        </p:nvSpPr>
+        <p:spPr>
+          <a:xfrm rot="13414979">
+            <a:off x="1965773" y="3869268"/>
+            <a:ext cx="635000" cy="397933"/>
+          </a:xfrm>
+          <a:prstGeom prst="rightArrow">
+            <a:avLst/>
+          </a:prstGeom>
+          <a:solidFill>
+            <a:srgbClr val="FF0000"/>
+          </a:solidFill>
+          <a:ln>
+            <a:solidFill>
+              <a:schemeClr val="tx1"/>
+            </a:solidFill>
+          </a:ln>
+        </p:spPr>
+        <p:style>
+          <a:lnRef idx="2">
+            <a:schemeClr val="accent1">
+              <a:shade val="50000"/>
+            </a:schemeClr>
+          </a:lnRef>
+          <a:fillRef idx="1">
+            <a:schemeClr val="accent1"/>
+          </a:fillRef>
+          <a:effectRef idx="0">
+            <a:schemeClr val="accent1"/>
+          </a:effectRef>
+          <a:fontRef idx="minor">
+            <a:schemeClr val="lt1"/>
+          </a:fontRef>
+        </p:style>
+        <p:txBody>
+          <a:bodyPr rtlCol="0" anchor="ctr"/>
+          <a:lstStyle/>
+          <a:p>
+            <a:pPr algn="ctr"/>
+            <a:endParaRPr kumimoji="1" lang="ja-JP" altLang="en-US"/>
+          </a:p>
+        </p:txBody>
+      </p:sp>
     </p:spTree>
     <p:extLst>
       <p:ext uri="{BB962C8B-B14F-4D97-AF65-F5344CB8AC3E}">
-        <p14:creationId xmlns:p14="http://schemas.microsoft.com/office/powerpoint/2010/main" val="2781402315"/>
+        <p14:creationId xmlns:p14="http://schemas.microsoft.com/office/powerpoint/2010/main" val="1292395181"/>
       </p:ext>
     </p:extLst>
   </p:cSld>
@@ -5635,7 +5619,7 @@
         <p:spPr>
           <a:xfrm>
             <a:off x="567542" y="1216429"/>
-            <a:ext cx="7879080" cy="830997"/>
+            <a:ext cx="9958175" cy="830997"/>
           </a:xfrm>
           <a:prstGeom prst="rect">
             <a:avLst/>
@@ -5650,23 +5634,69 @@
           <a:p>
             <a:r>
               <a:rPr lang="ja-JP" altLang="en-US" sz="2400" dirty="0"/>
-              <a:t>これで準備は完了になります。</a:t>
+              <a:t>ダウンロードした</a:t>
+            </a:r>
+            <a:r>
+              <a:rPr lang="en-US" altLang="ja-JP" sz="2400" dirty="0"/>
+              <a:t>Unity Package</a:t>
+            </a:r>
+            <a:r>
+              <a:rPr lang="ja-JP" altLang="en-US" sz="2400" dirty="0"/>
+              <a:t>ファイルを開くと、</a:t>
             </a:r>
             <a:endParaRPr lang="en-US" altLang="ja-JP" sz="2400" dirty="0"/>
           </a:p>
           <a:p>
             <a:r>
               <a:rPr lang="ja-JP" altLang="en-US" sz="2400" dirty="0"/>
-              <a:t>次回、プロジェクトを作成して通信部分を実装します。</a:t>
+              <a:t>開いているプロジェクトに</a:t>
+            </a:r>
+            <a:r>
+              <a:rPr lang="en-US" altLang="ja-JP" sz="2400" dirty="0"/>
+              <a:t>Photon Fusion SDK</a:t>
+            </a:r>
+            <a:r>
+              <a:rPr lang="ja-JP" altLang="en-US" sz="2400" dirty="0"/>
+              <a:t>がインポートされます。</a:t>
             </a:r>
             <a:endParaRPr lang="en-US" altLang="ja-JP" sz="2400" dirty="0"/>
           </a:p>
         </p:txBody>
       </p:sp>
+      <p:pic>
+        <p:nvPicPr>
+          <p:cNvPr id="5" name="図 4">
+            <a:extLst>
+              <a:ext uri="{FF2B5EF4-FFF2-40B4-BE49-F238E27FC236}">
+                <a16:creationId xmlns:a16="http://schemas.microsoft.com/office/drawing/2014/main" id="{C4493BB7-C872-42B8-8F43-C20F9E3ABC60}"/>
+              </a:ext>
+            </a:extLst>
+          </p:cNvPr>
+          <p:cNvPicPr>
+            <a:picLocks noChangeAspect="1"/>
+          </p:cNvPicPr>
+          <p:nvPr/>
+        </p:nvPicPr>
+        <p:blipFill>
+          <a:blip r:embed="rId2"/>
+          <a:stretch>
+            <a:fillRect/>
+          </a:stretch>
+        </p:blipFill>
+        <p:spPr>
+          <a:xfrm>
+            <a:off x="567542" y="2187126"/>
+            <a:ext cx="6594866" cy="4247541"/>
+          </a:xfrm>
+          <a:prstGeom prst="rect">
+            <a:avLst/>
+          </a:prstGeom>
+        </p:spPr>
+      </p:pic>
     </p:spTree>
     <p:extLst>
       <p:ext uri="{BB962C8B-B14F-4D97-AF65-F5344CB8AC3E}">
-        <p14:creationId xmlns:p14="http://schemas.microsoft.com/office/powerpoint/2010/main" val="1292395181"/>
+        <p14:creationId xmlns:p14="http://schemas.microsoft.com/office/powerpoint/2010/main" val="2876846310"/>
       </p:ext>
     </p:extLst>
   </p:cSld>
